--- a/dist/초3/국어/읽기와어휘/초3_국어_읽기와어휘_02_문맥으로낱말뜻짐작_학생용.pptx
+++ b/dist/초3/국어/읽기와어휘/초3_국어_읽기와어휘_02_문맥으로낱말뜻짐작_학생용.pptx
@@ -118,38 +118,38 @@
   <p:extLst>
     <p:ext uri="{521415D9-36F7-43E2-AB2F-B90AF26B5E84}">
       <p14:sectionLst xmlns:p14="http://schemas.microsoft.com/office/powerpoint/2010/main">
-        <p14:section name="도입" id="{90b6f217-3c74-f29c-51fd-079f56ae0d48}">
+        <p14:section name="도입" id="{00bd3739-eb07-6705-c3e2-280cc0c4904f}">
           <p14:sldIdLst>
             <p14:sldId id="256"/>
             <p14:sldId id="257"/>
           </p14:sldIdLst>
         </p14:section>
-        <p14:section name="개념" id="{068d2144-121d-7b79-41ae-e30b916dee22}">
+        <p14:section name="개념" id="{6098aeed-513d-8f69-a549-687198dfd93c}">
           <p14:sldIdLst>
             <p14:sldId id="258"/>
             <p14:sldId id="259"/>
             <p14:sldId id="260"/>
           </p14:sldIdLst>
         </p14:section>
-        <p14:section name="연습" id="{7f48ee4c-f209-df62-d3cb-1fb6c9a0ada1}">
+        <p14:section name="연습" id="{a6c25948-5b8d-8322-de76-4d744d8ce763}">
           <p14:sldIdLst>
             <p14:sldId id="261"/>
             <p14:sldId id="262"/>
             <p14:sldId id="263"/>
           </p14:sldIdLst>
         </p14:section>
-        <p14:section name="확인" id="{36d67a49-b255-4d33-3d7f-0b3d0c774bdf}">
+        <p14:section name="확인" id="{1c899a2e-0de0-4ac9-04ee-4dcfdefc4c25}">
           <p14:sldIdLst>
             <p14:sldId id="264"/>
             <p14:sldId id="265"/>
           </p14:sldIdLst>
         </p14:section>
-        <p14:section name="정리" id="{83137983-2458-a96f-0d6d-3220788cc283}">
+        <p14:section name="정리" id="{01a0fb6a-3f5d-c3e3-fa09-1c1c66ad2757}">
           <p14:sldIdLst>
             <p14:sldId id="266"/>
           </p14:sldIdLst>
         </p14:section>
-        <p14:section name="보충" id="{4031ed32-8220-208f-6b13-caf19b733eff}">
+        <p14:section name="보충" id="{5e7fc4c8-87f8-1004-c42b-14c093becd14}">
           <p14:sldIdLst>
             <p14:sldId id="267"/>
           </p14:sldIdLst>
@@ -2605,7 +2605,7 @@
           <a:bodyPr wrap="square" lIns="0" tIns="0" rIns="0" bIns="0" rtlCol="0" anchor="ctr"/>
           <a:lstStyle/>
           <a:p>
-            <a:pPr algn="l" indent="0" marL="0">
+            <a:pPr eaLnBrk="0" algn="l" indent="0" marL="0">
               <a:buNone/>
             </a:pPr>
             <a:r>
@@ -2646,7 +2646,7 @@
           <a:bodyPr wrap="square" lIns="0" tIns="0" rIns="0" bIns="0" rtlCol="0" anchor="t"/>
           <a:lstStyle/>
           <a:p>
-            <a:pPr indent="0" marL="0">
+            <a:pPr eaLnBrk="0" indent="0" marL="0">
               <a:buNone/>
             </a:pPr>
             <a:r>
@@ -2712,7 +2712,7 @@
           <a:bodyPr wrap="square" lIns="0" tIns="0" rIns="0" bIns="0" rtlCol="0" anchor="ctr"/>
           <a:lstStyle/>
           <a:p>
-            <a:pPr indent="0" marL="0">
+            <a:pPr eaLnBrk="0" indent="0" marL="0">
               <a:spcAft>
                 <a:spcPts val="600"/>
               </a:spcAft>
@@ -2732,7 +2732,7 @@
             <a:endParaRPr lang="ko-KR" sz="3000" dirty="0"/>
           </a:p>
           <a:p>
-            <a:pPr indent="0" marL="0">
+            <a:pPr eaLnBrk="0" indent="0" marL="0">
               <a:spcAft>
                 <a:spcPts val="600"/>
               </a:spcAft>
@@ -2752,7 +2752,7 @@
             <a:endParaRPr lang="ko-KR" sz="3000" dirty="0"/>
           </a:p>
           <a:p>
-            <a:pPr indent="0" marL="0">
+            <a:pPr eaLnBrk="0" indent="0" marL="0">
               <a:spcAft>
                 <a:spcPts val="600"/>
               </a:spcAft>
@@ -2821,7 +2821,7 @@
           <a:bodyPr wrap="square" lIns="0" tIns="0" rIns="0" bIns="0" rtlCol="0" anchor="ctr"/>
           <a:lstStyle/>
           <a:p>
-            <a:pPr algn="l" indent="0" marL="0">
+            <a:pPr eaLnBrk="0" algn="l" indent="0" marL="0">
               <a:buNone/>
             </a:pPr>
             <a:r>
@@ -2860,7 +2860,7 @@
           <a:bodyPr wrap="square" lIns="0" tIns="0" rIns="0" bIns="0" rtlCol="0" anchor="ctr"/>
           <a:lstStyle/>
           <a:p>
-            <a:pPr algn="l" indent="0" marL="0">
+            <a:pPr eaLnBrk="0" algn="l" indent="0" marL="0">
               <a:buNone/>
             </a:pPr>
             <a:r>
@@ -2926,7 +2926,7 @@
           <a:bodyPr wrap="square" lIns="0" tIns="0" rIns="0" bIns="0" rtlCol="0" anchor="ctr"/>
           <a:lstStyle/>
           <a:p>
-            <a:pPr indent="0" marL="0">
+            <a:pPr eaLnBrk="0" indent="0" marL="0">
               <a:spcAft>
                 <a:spcPts val="600"/>
               </a:spcAft>
@@ -2976,7 +2976,7 @@
           <a:bodyPr wrap="square" lIns="0" tIns="0" rIns="0" bIns="0" rtlCol="0" anchor="ctr"/>
           <a:lstStyle/>
           <a:p>
-            <a:pPr algn="ctr" indent="0" marL="0">
+            <a:pPr eaLnBrk="0" algn="ctr" indent="0" marL="0">
               <a:buNone/>
             </a:pPr>
             <a:r>
@@ -3042,7 +3042,7 @@
           <a:bodyPr wrap="square" lIns="0" tIns="0" rIns="0" bIns="0" rtlCol="0" anchor="ctr"/>
           <a:lstStyle/>
           <a:p>
-            <a:pPr indent="0" marL="0">
+            <a:pPr eaLnBrk="0" indent="0" marL="0">
               <a:spcAft>
                 <a:spcPts val="600"/>
               </a:spcAft>
@@ -3092,7 +3092,7 @@
           <a:bodyPr wrap="square" lIns="0" tIns="0" rIns="0" bIns="0" rtlCol="0" anchor="ctr"/>
           <a:lstStyle/>
           <a:p>
-            <a:pPr algn="ctr" indent="0" marL="0">
+            <a:pPr eaLnBrk="0" algn="ctr" indent="0" marL="0">
               <a:buNone/>
             </a:pPr>
             <a:r>
@@ -3158,7 +3158,7 @@
           <a:bodyPr wrap="square" lIns="0" tIns="0" rIns="0" bIns="0" rtlCol="0" anchor="ctr"/>
           <a:lstStyle/>
           <a:p>
-            <a:pPr indent="0" marL="0">
+            <a:pPr eaLnBrk="0" indent="0" marL="0">
               <a:spcAft>
                 <a:spcPts val="600"/>
               </a:spcAft>
@@ -3208,7 +3208,7 @@
           <a:bodyPr wrap="square" lIns="0" tIns="0" rIns="0" bIns="0" rtlCol="0" anchor="ctr"/>
           <a:lstStyle/>
           <a:p>
-            <a:pPr algn="ctr" indent="0" marL="0">
+            <a:pPr eaLnBrk="0" algn="ctr" indent="0" marL="0">
               <a:buNone/>
             </a:pPr>
             <a:r>
@@ -3274,7 +3274,7 @@
           <a:bodyPr wrap="square" lIns="0" tIns="0" rIns="0" bIns="0" rtlCol="0" anchor="ctr"/>
           <a:lstStyle/>
           <a:p>
-            <a:pPr indent="0" marL="0">
+            <a:pPr eaLnBrk="0" indent="0" marL="0">
               <a:spcAft>
                 <a:spcPts val="600"/>
               </a:spcAft>
@@ -3334,7 +3334,7 @@
             </a:lvl1pPr>
           </a:lstStyle>
           <a:p>
-            <a:pPr algn="r"/>
+            <a:pPr eaLnBrk="0" algn="r"/>
             <a:fld id="{F7021451-1387-4CA6-816F-3879F97B5CBC}" type="slidenum">
               <a:rPr b="0" lang="en-US"/>
               <a:t>10</a:t>
@@ -3391,7 +3391,7 @@
           <a:bodyPr wrap="square" lIns="0" tIns="0" rIns="0" bIns="0" rtlCol="0" anchor="ctr"/>
           <a:lstStyle/>
           <a:p>
-            <a:pPr algn="l" indent="0" marL="0">
+            <a:pPr eaLnBrk="0" algn="l" indent="0" marL="0">
               <a:buNone/>
             </a:pPr>
             <a:r>
@@ -3457,7 +3457,7 @@
           <a:bodyPr wrap="square" lIns="0" tIns="0" rIns="0" bIns="0" rtlCol="0" anchor="ctr"/>
           <a:lstStyle/>
           <a:p>
-            <a:pPr indent="0" marL="0">
+            <a:pPr eaLnBrk="0" indent="0" marL="0">
               <a:spcAft>
                 <a:spcPts val="600"/>
               </a:spcAft>
@@ -3507,7 +3507,7 @@
           <a:bodyPr wrap="square" lIns="177800" tIns="0" rIns="177800" bIns="0" rtlCol="0" anchor="ctr"/>
           <a:lstStyle/>
           <a:p>
-            <a:pPr algn="l" indent="0" marL="0">
+            <a:pPr eaLnBrk="0" algn="l" indent="0" marL="0">
               <a:buNone/>
             </a:pPr>
             <a:r>
@@ -3554,7 +3554,7 @@
           <a:bodyPr wrap="square" lIns="177800" tIns="0" rIns="177800" bIns="0" rtlCol="0" anchor="ctr"/>
           <a:lstStyle/>
           <a:p>
-            <a:pPr algn="l" indent="0" marL="0">
+            <a:pPr eaLnBrk="0" algn="l" indent="0" marL="0">
               <a:buNone/>
             </a:pPr>
             <a:r>
@@ -3593,7 +3593,7 @@
           <a:bodyPr wrap="square" lIns="0" tIns="0" rIns="0" bIns="0" rtlCol="0" anchor="t"/>
           <a:lstStyle/>
           <a:p>
-            <a:pPr algn="l" indent="0" marL="0">
+            <a:pPr eaLnBrk="0" algn="l" indent="0" marL="0">
               <a:buNone/>
             </a:pPr>
             <a:r>
@@ -3632,7 +3632,7 @@
           <a:bodyPr wrap="square" lIns="0" tIns="0" rIns="0" bIns="0" rtlCol="0" anchor="ctr"/>
           <a:lstStyle/>
           <a:p>
-            <a:pPr algn="l" indent="0" marL="0">
+            <a:pPr eaLnBrk="0" algn="l" indent="0" marL="0">
               <a:buNone/>
             </a:pPr>
             <a:r>
@@ -3671,7 +3671,7 @@
           <a:bodyPr wrap="square" lIns="0" tIns="0" rIns="0" bIns="0" rtlCol="0" anchor="ctr"/>
           <a:lstStyle/>
           <a:p>
-            <a:pPr algn="l" indent="0" marL="0">
+            <a:pPr eaLnBrk="0" algn="l" indent="0" marL="0">
               <a:buNone/>
             </a:pPr>
             <a:r>
@@ -3710,7 +3710,7 @@
           <a:bodyPr wrap="square" lIns="0" tIns="0" rIns="0" bIns="0" rtlCol="0" anchor="ctr"/>
           <a:lstStyle/>
           <a:p>
-            <a:pPr algn="l" indent="0" marL="0">
+            <a:pPr eaLnBrk="0" algn="l" indent="0" marL="0">
               <a:buNone/>
             </a:pPr>
             <a:r>
@@ -3749,7 +3749,7 @@
           <a:bodyPr wrap="square" lIns="0" tIns="0" rIns="0" bIns="0" rtlCol="0" anchor="ctr"/>
           <a:lstStyle/>
           <a:p>
-            <a:pPr algn="l" indent="0" marL="0">
+            <a:pPr eaLnBrk="0" algn="l" indent="0" marL="0">
               <a:buNone/>
             </a:pPr>
             <a:r>
@@ -3806,7 +3806,7 @@
             </a:lvl1pPr>
           </a:lstStyle>
           <a:p>
-            <a:pPr algn="r"/>
+            <a:pPr eaLnBrk="0" algn="r"/>
             <a:fld id="{F7021451-1387-4CA6-816F-3879F97B5CBC}" type="slidenum">
               <a:rPr b="0" lang="en-US"/>
               <a:t>11</a:t>
@@ -3863,7 +3863,7 @@
           <a:bodyPr wrap="square" lIns="0" tIns="0" rIns="0" bIns="0" rtlCol="0" anchor="ctr"/>
           <a:lstStyle/>
           <a:p>
-            <a:pPr algn="l" indent="0" marL="0">
+            <a:pPr eaLnBrk="0" algn="l" indent="0" marL="0">
               <a:buNone/>
             </a:pPr>
             <a:r>
@@ -3902,7 +3902,7 @@
           <a:bodyPr wrap="square" lIns="0" tIns="0" rIns="0" bIns="0" rtlCol="0" anchor="ctr"/>
           <a:lstStyle/>
           <a:p>
-            <a:pPr algn="l" indent="0" marL="0">
+            <a:pPr eaLnBrk="0" algn="l" indent="0" marL="0">
               <a:buNone/>
             </a:pPr>
             <a:r>
@@ -3968,7 +3968,7 @@
           <a:bodyPr wrap="square" lIns="0" tIns="0" rIns="0" bIns="0" rtlCol="0" anchor="ctr"/>
           <a:lstStyle/>
           <a:p>
-            <a:pPr indent="0" marL="0">
+            <a:pPr eaLnBrk="0" indent="0" marL="0">
               <a:spcAft>
                 <a:spcPts val="600"/>
               </a:spcAft>
@@ -4018,7 +4018,7 @@
           <a:bodyPr wrap="square" lIns="0" tIns="0" rIns="0" bIns="0" rtlCol="0" anchor="ctr"/>
           <a:lstStyle/>
           <a:p>
-            <a:pPr algn="ctr" indent="0" marL="0">
+            <a:pPr eaLnBrk="0" algn="ctr" indent="0" marL="0">
               <a:buNone/>
             </a:pPr>
             <a:r>
@@ -4057,7 +4057,7 @@
           <a:bodyPr wrap="square" lIns="0" tIns="0" rIns="0" bIns="0" rtlCol="0" anchor="ctr"/>
           <a:lstStyle/>
           <a:p>
-            <a:pPr algn="l" indent="0" marL="0">
+            <a:pPr eaLnBrk="0" algn="l" indent="0" marL="0">
               <a:buNone/>
             </a:pPr>
             <a:r>
@@ -4104,7 +4104,7 @@
           <a:bodyPr wrap="square" lIns="0" tIns="0" rIns="0" bIns="0" rtlCol="0" anchor="ctr"/>
           <a:lstStyle/>
           <a:p>
-            <a:pPr algn="ctr" indent="0" marL="0">
+            <a:pPr eaLnBrk="0" algn="ctr" indent="0" marL="0">
               <a:buNone/>
             </a:pPr>
             <a:r>
@@ -4143,7 +4143,7 @@
           <a:bodyPr wrap="square" lIns="0" tIns="0" rIns="0" bIns="0" rtlCol="0" anchor="ctr"/>
           <a:lstStyle/>
           <a:p>
-            <a:pPr algn="l" indent="0" marL="0">
+            <a:pPr eaLnBrk="0" algn="l" indent="0" marL="0">
               <a:buNone/>
             </a:pPr>
             <a:r>
@@ -4190,7 +4190,7 @@
           <a:bodyPr wrap="square" lIns="0" tIns="0" rIns="0" bIns="0" rtlCol="0" anchor="ctr"/>
           <a:lstStyle/>
           <a:p>
-            <a:pPr algn="ctr" indent="0" marL="0">
+            <a:pPr eaLnBrk="0" algn="ctr" indent="0" marL="0">
               <a:buNone/>
             </a:pPr>
             <a:r>
@@ -4229,7 +4229,7 @@
           <a:bodyPr wrap="square" lIns="0" tIns="0" rIns="0" bIns="0" rtlCol="0" anchor="ctr"/>
           <a:lstStyle/>
           <a:p>
-            <a:pPr algn="l" indent="0" marL="0">
+            <a:pPr eaLnBrk="0" algn="l" indent="0" marL="0">
               <a:buNone/>
             </a:pPr>
             <a:r>
@@ -4286,7 +4286,7 @@
             </a:lvl1pPr>
           </a:lstStyle>
           <a:p>
-            <a:pPr algn="r"/>
+            <a:pPr eaLnBrk="0" algn="r"/>
             <a:fld id="{F7021451-1387-4CA6-816F-3879F97B5CBC}" type="slidenum">
               <a:rPr b="0" lang="en-US"/>
               <a:t>12</a:t>
@@ -4343,7 +4343,7 @@
           <a:bodyPr wrap="square" lIns="0" tIns="0" rIns="0" bIns="0" rtlCol="0" anchor="ctr"/>
           <a:lstStyle/>
           <a:p>
-            <a:pPr algn="l" indent="0" marL="0">
+            <a:pPr eaLnBrk="0" algn="l" indent="0" marL="0">
               <a:buNone/>
             </a:pPr>
             <a:r>
@@ -4409,7 +4409,7 @@
           <a:bodyPr wrap="square" lIns="0" tIns="0" rIns="0" bIns="0" rtlCol="0" anchor="ctr"/>
           <a:lstStyle/>
           <a:p>
-            <a:pPr indent="0" marL="0">
+            <a:pPr eaLnBrk="0" indent="0" marL="0">
               <a:spcAft>
                 <a:spcPts val="600"/>
               </a:spcAft>
@@ -4478,7 +4478,7 @@
           <a:bodyPr wrap="square" lIns="0" tIns="0" rIns="0" bIns="0" rtlCol="0" anchor="t"/>
           <a:lstStyle/>
           <a:p>
-            <a:pPr indent="0" marL="0">
+            <a:pPr eaLnBrk="0" algn="l" indent="0" marL="0">
               <a:lnSpc>
                 <a:spcPct val="105000"/>
               </a:lnSpc>
@@ -4541,7 +4541,7 @@
             </a:lvl1pPr>
           </a:lstStyle>
           <a:p>
-            <a:pPr algn="r"/>
+            <a:pPr eaLnBrk="0" algn="r"/>
             <a:fld id="{F7021451-1387-4CA6-816F-3879F97B5CBC}" type="slidenum">
               <a:rPr b="0" lang="en-US"/>
               <a:t>2</a:t>
@@ -4598,7 +4598,7 @@
           <a:bodyPr wrap="square" lIns="0" tIns="0" rIns="0" bIns="0" rtlCol="0" anchor="ctr"/>
           <a:lstStyle/>
           <a:p>
-            <a:pPr algn="l" indent="0" marL="0">
+            <a:pPr eaLnBrk="0" algn="l" indent="0" marL="0">
               <a:buNone/>
             </a:pPr>
             <a:r>
@@ -4664,7 +4664,7 @@
           <a:bodyPr wrap="square" lIns="0" tIns="0" rIns="0" bIns="0" rtlCol="0" anchor="ctr"/>
           <a:lstStyle/>
           <a:p>
-            <a:pPr indent="0" marL="0">
+            <a:pPr eaLnBrk="0" indent="0" marL="0">
               <a:spcAft>
                 <a:spcPts val="600"/>
               </a:spcAft>
@@ -4733,7 +4733,7 @@
           <a:bodyPr wrap="square" lIns="0" tIns="0" rIns="0" bIns="0" rtlCol="0" anchor="ctr"/>
           <a:lstStyle/>
           <a:p>
-            <a:pPr indent="0" marL="0">
+            <a:pPr eaLnBrk="0" indent="0" marL="0">
               <a:spcAft>
                 <a:spcPts val="600"/>
               </a:spcAft>
@@ -4753,7 +4753,7 @@
             <a:endParaRPr lang="ko-KR" sz="3000" dirty="0"/>
           </a:p>
           <a:p>
-            <a:pPr indent="0" marL="0">
+            <a:pPr eaLnBrk="0" indent="0" marL="0">
               <a:spcAft>
                 <a:spcPts val="600"/>
               </a:spcAft>
@@ -4822,7 +4822,7 @@
           <a:bodyPr wrap="square" lIns="0" tIns="0" rIns="0" bIns="0" rtlCol="0" anchor="ctr"/>
           <a:lstStyle/>
           <a:p>
-            <a:pPr indent="0" marL="0">
+            <a:pPr eaLnBrk="0" indent="0" marL="0">
               <a:spcAft>
                 <a:spcPts val="600"/>
               </a:spcAft>
@@ -4842,7 +4842,7 @@
             <a:endParaRPr lang="ko-KR" sz="3000" dirty="0"/>
           </a:p>
           <a:p>
-            <a:pPr indent="0" marL="0">
+            <a:pPr eaLnBrk="0" indent="0" marL="0">
               <a:spcAft>
                 <a:spcPts val="600"/>
               </a:spcAft>
@@ -4911,7 +4911,7 @@
           <a:bodyPr wrap="square" lIns="0" tIns="0" rIns="0" bIns="0" rtlCol="0" anchor="ctr"/>
           <a:lstStyle/>
           <a:p>
-            <a:pPr indent="0" marL="0">
+            <a:pPr eaLnBrk="0" indent="0" marL="0">
               <a:spcAft>
                 <a:spcPts val="600"/>
               </a:spcAft>
@@ -4931,7 +4931,7 @@
             <a:endParaRPr lang="ko-KR" sz="3000" dirty="0"/>
           </a:p>
           <a:p>
-            <a:pPr indent="0" marL="0">
+            <a:pPr eaLnBrk="0" indent="0" marL="0">
               <a:spcAft>
                 <a:spcPts val="600"/>
               </a:spcAft>
@@ -4991,7 +4991,7 @@
             </a:lvl1pPr>
           </a:lstStyle>
           <a:p>
-            <a:pPr algn="r"/>
+            <a:pPr eaLnBrk="0" algn="r"/>
             <a:fld id="{F7021451-1387-4CA6-816F-3879F97B5CBC}" type="slidenum">
               <a:rPr b="0" lang="en-US"/>
               <a:t>3</a:t>
@@ -5048,7 +5048,7 @@
           <a:bodyPr wrap="square" lIns="0" tIns="0" rIns="0" bIns="0" rtlCol="0" anchor="ctr"/>
           <a:lstStyle/>
           <a:p>
-            <a:pPr algn="l" indent="0" marL="0">
+            <a:pPr eaLnBrk="0" algn="l" indent="0" marL="0">
               <a:buNone/>
             </a:pPr>
             <a:r>
@@ -5114,7 +5114,7 @@
           <a:bodyPr wrap="square" lIns="0" tIns="0" rIns="0" bIns="0" rtlCol="0" anchor="ctr"/>
           <a:lstStyle/>
           <a:p>
-            <a:pPr indent="0" marL="0">
+            <a:pPr eaLnBrk="0" indent="0" marL="0">
               <a:spcAft>
                 <a:spcPts val="600"/>
               </a:spcAft>
@@ -5183,7 +5183,7 @@
           <a:bodyPr wrap="square" lIns="0" tIns="0" rIns="0" bIns="0" rtlCol="0" anchor="t"/>
           <a:lstStyle/>
           <a:p>
-            <a:pPr indent="0" marL="0">
+            <a:pPr eaLnBrk="0" algn="l" indent="0" marL="0">
               <a:lnSpc>
                 <a:spcPct val="105000"/>
               </a:lnSpc>
@@ -5246,7 +5246,7 @@
             </a:lvl1pPr>
           </a:lstStyle>
           <a:p>
-            <a:pPr algn="r"/>
+            <a:pPr eaLnBrk="0" algn="r"/>
             <a:fld id="{F7021451-1387-4CA6-816F-3879F97B5CBC}" type="slidenum">
               <a:rPr b="0" lang="en-US"/>
               <a:t>4</a:t>
@@ -5303,7 +5303,7 @@
           <a:bodyPr wrap="square" lIns="0" tIns="0" rIns="0" bIns="0" rtlCol="0" anchor="ctr"/>
           <a:lstStyle/>
           <a:p>
-            <a:pPr algn="l" indent="0" marL="0">
+            <a:pPr eaLnBrk="0" algn="l" indent="0" marL="0">
               <a:buNone/>
             </a:pPr>
             <a:r>
@@ -5348,7 +5348,7 @@
           <a:bodyPr wrap="square" lIns="0" tIns="0" rIns="0" bIns="0" rtlCol="0" anchor="ctr"/>
           <a:lstStyle/>
           <a:p>
-            <a:pPr algn="ctr" indent="0" marL="0">
+            <a:pPr eaLnBrk="0" algn="ctr" indent="0" marL="0">
               <a:buNone/>
             </a:pPr>
             <a:r>
@@ -5387,7 +5387,7 @@
           <a:bodyPr wrap="square" lIns="0" tIns="0" rIns="0" bIns="0" rtlCol="0" anchor="t"/>
           <a:lstStyle/>
           <a:p>
-            <a:pPr algn="l" indent="0" marL="0">
+            <a:pPr eaLnBrk="0" algn="l" indent="0" marL="0">
               <a:buNone/>
             </a:pPr>
             <a:r>
@@ -5432,7 +5432,7 @@
           <a:bodyPr wrap="square" lIns="0" tIns="0" rIns="0" bIns="0" rtlCol="0" anchor="ctr"/>
           <a:lstStyle/>
           <a:p>
-            <a:pPr algn="ctr" indent="0" marL="0">
+            <a:pPr eaLnBrk="0" algn="ctr" indent="0" marL="0">
               <a:buNone/>
             </a:pPr>
             <a:r>
@@ -5471,7 +5471,7 @@
           <a:bodyPr wrap="square" lIns="0" tIns="0" rIns="0" bIns="0" rtlCol="0" anchor="t"/>
           <a:lstStyle/>
           <a:p>
-            <a:pPr algn="l" indent="0" marL="0">
+            <a:pPr eaLnBrk="0" algn="l" indent="0" marL="0">
               <a:buNone/>
             </a:pPr>
             <a:r>
@@ -5516,7 +5516,7 @@
           <a:bodyPr wrap="square" lIns="0" tIns="0" rIns="0" bIns="0" rtlCol="0" anchor="ctr"/>
           <a:lstStyle/>
           <a:p>
-            <a:pPr algn="ctr" indent="0" marL="0">
+            <a:pPr eaLnBrk="0" algn="ctr" indent="0" marL="0">
               <a:buNone/>
             </a:pPr>
             <a:r>
@@ -5555,7 +5555,7 @@
           <a:bodyPr wrap="square" lIns="0" tIns="0" rIns="0" bIns="0" rtlCol="0" anchor="t"/>
           <a:lstStyle/>
           <a:p>
-            <a:pPr algn="l" indent="0" marL="0">
+            <a:pPr eaLnBrk="0" algn="l" indent="0" marL="0">
               <a:buNone/>
             </a:pPr>
             <a:r>
@@ -5600,7 +5600,7 @@
           <a:bodyPr wrap="square" lIns="0" tIns="0" rIns="0" bIns="0" rtlCol="0" anchor="ctr"/>
           <a:lstStyle/>
           <a:p>
-            <a:pPr algn="ctr" indent="0" marL="0">
+            <a:pPr eaLnBrk="0" algn="ctr" indent="0" marL="0">
               <a:buNone/>
             </a:pPr>
             <a:r>
@@ -5639,7 +5639,7 @@
           <a:bodyPr wrap="square" lIns="0" tIns="0" rIns="0" bIns="0" rtlCol="0" anchor="t"/>
           <a:lstStyle/>
           <a:p>
-            <a:pPr algn="l" indent="0" marL="0">
+            <a:pPr eaLnBrk="0" algn="l" indent="0" marL="0">
               <a:buNone/>
             </a:pPr>
             <a:r>
@@ -5684,7 +5684,7 @@
           <a:bodyPr wrap="square" lIns="0" tIns="0" rIns="0" bIns="0" rtlCol="0" anchor="ctr"/>
           <a:lstStyle/>
           <a:p>
-            <a:pPr algn="ctr" indent="0" marL="0">
+            <a:pPr eaLnBrk="0" algn="ctr" indent="0" marL="0">
               <a:buNone/>
             </a:pPr>
             <a:r>
@@ -5723,7 +5723,7 @@
           <a:bodyPr wrap="square" lIns="0" tIns="0" rIns="0" bIns="0" rtlCol="0" anchor="t"/>
           <a:lstStyle/>
           <a:p>
-            <a:pPr algn="l" indent="0" marL="0">
+            <a:pPr eaLnBrk="0" algn="l" indent="0" marL="0">
               <a:buNone/>
             </a:pPr>
             <a:r>
@@ -5780,7 +5780,7 @@
             </a:lvl1pPr>
           </a:lstStyle>
           <a:p>
-            <a:pPr algn="r"/>
+            <a:pPr eaLnBrk="0" algn="r"/>
             <a:fld id="{F7021451-1387-4CA6-816F-3879F97B5CBC}" type="slidenum">
               <a:rPr b="0" lang="en-US"/>
               <a:t>5</a:t>
@@ -5837,7 +5837,7 @@
           <a:bodyPr wrap="square" lIns="0" tIns="0" rIns="0" bIns="0" rtlCol="0" anchor="ctr"/>
           <a:lstStyle/>
           <a:p>
-            <a:pPr algn="l" indent="0" marL="0">
+            <a:pPr eaLnBrk="0" algn="l" indent="0" marL="0">
               <a:buNone/>
             </a:pPr>
             <a:r>
@@ -5903,7 +5903,7 @@
           <a:bodyPr wrap="square" lIns="0" tIns="0" rIns="0" bIns="0" rtlCol="0" anchor="ctr"/>
           <a:lstStyle/>
           <a:p>
-            <a:pPr indent="0" marL="0">
+            <a:pPr eaLnBrk="0" indent="0" marL="0">
               <a:spcAft>
                 <a:spcPts val="600"/>
               </a:spcAft>
@@ -5972,7 +5972,7 @@
           <a:bodyPr wrap="square" lIns="0" tIns="0" rIns="0" bIns="0" rtlCol="0" anchor="t"/>
           <a:lstStyle/>
           <a:p>
-            <a:pPr indent="0" marL="0">
+            <a:pPr eaLnBrk="0" algn="l" indent="0" marL="0">
               <a:lnSpc>
                 <a:spcPct val="105000"/>
               </a:lnSpc>
@@ -6035,7 +6035,7 @@
             </a:lvl1pPr>
           </a:lstStyle>
           <a:p>
-            <a:pPr algn="r"/>
+            <a:pPr eaLnBrk="0" algn="r"/>
             <a:fld id="{F7021451-1387-4CA6-816F-3879F97B5CBC}" type="slidenum">
               <a:rPr b="0" lang="en-US"/>
               <a:t>6</a:t>
@@ -6092,7 +6092,7 @@
           <a:bodyPr wrap="square" lIns="0" tIns="0" rIns="0" bIns="0" rtlCol="0" anchor="ctr"/>
           <a:lstStyle/>
           <a:p>
-            <a:pPr algn="l" indent="0" marL="0">
+            <a:pPr eaLnBrk="0" algn="l" indent="0" marL="0">
               <a:buNone/>
             </a:pPr>
             <a:r>
@@ -6158,7 +6158,7 @@
           <a:bodyPr wrap="square" lIns="0" tIns="0" rIns="0" bIns="0" rtlCol="0" anchor="ctr"/>
           <a:lstStyle/>
           <a:p>
-            <a:pPr indent="0" marL="0">
+            <a:pPr eaLnBrk="0" indent="0" marL="0">
               <a:spcAft>
                 <a:spcPts val="600"/>
               </a:spcAft>
@@ -6227,7 +6227,7 @@
           <a:bodyPr wrap="square" lIns="0" tIns="0" rIns="0" bIns="0" rtlCol="0" anchor="ctr"/>
           <a:lstStyle/>
           <a:p>
-            <a:pPr indent="0" marL="0">
+            <a:pPr eaLnBrk="0" indent="0" marL="0">
               <a:spcAft>
                 <a:spcPts val="600"/>
               </a:spcAft>
@@ -6277,7 +6277,7 @@
           <a:bodyPr wrap="square" lIns="177800" tIns="0" rIns="177800" bIns="0" rtlCol="0" anchor="ctr"/>
           <a:lstStyle/>
           <a:p>
-            <a:pPr algn="l" indent="0" marL="0">
+            <a:pPr eaLnBrk="0" algn="l" indent="0" marL="0">
               <a:buNone/>
             </a:pPr>
             <a:r>
@@ -6316,7 +6316,7 @@
           <a:bodyPr wrap="square" lIns="0" tIns="0" rIns="0" bIns="0" rtlCol="0" anchor="t"/>
           <a:lstStyle/>
           <a:p>
-            <a:pPr algn="l" indent="0" marL="0">
+            <a:pPr eaLnBrk="0" algn="l" indent="0" marL="0">
               <a:buNone/>
             </a:pPr>
             <a:r>
@@ -6363,7 +6363,7 @@
           <a:bodyPr wrap="square" lIns="177800" tIns="0" rIns="177800" bIns="0" rtlCol="0" anchor="ctr"/>
           <a:lstStyle/>
           <a:p>
-            <a:pPr algn="l" indent="0" marL="0">
+            <a:pPr eaLnBrk="0" algn="l" indent="0" marL="0">
               <a:buNone/>
             </a:pPr>
             <a:r>
@@ -6402,7 +6402,7 @@
           <a:bodyPr wrap="square" lIns="0" tIns="0" rIns="0" bIns="0" rtlCol="0" anchor="t"/>
           <a:lstStyle/>
           <a:p>
-            <a:pPr algn="l" indent="0" marL="0">
+            <a:pPr eaLnBrk="0" algn="l" indent="0" marL="0">
               <a:buNone/>
             </a:pPr>
             <a:r>
@@ -6459,7 +6459,7 @@
             </a:lvl1pPr>
           </a:lstStyle>
           <a:p>
-            <a:pPr algn="r"/>
+            <a:pPr eaLnBrk="0" algn="r"/>
             <a:fld id="{F7021451-1387-4CA6-816F-3879F97B5CBC}" type="slidenum">
               <a:rPr b="0" lang="en-US"/>
               <a:t>7</a:t>
@@ -6516,7 +6516,7 @@
           <a:bodyPr wrap="square" lIns="0" tIns="0" rIns="0" bIns="0" rtlCol="0" anchor="ctr"/>
           <a:lstStyle/>
           <a:p>
-            <a:pPr algn="l" indent="0" marL="0">
+            <a:pPr eaLnBrk="0" algn="l" indent="0" marL="0">
               <a:buNone/>
             </a:pPr>
             <a:r>
@@ -6555,7 +6555,7 @@
           <a:bodyPr wrap="square" lIns="0" tIns="0" rIns="0" bIns="0" rtlCol="0" anchor="ctr"/>
           <a:lstStyle/>
           <a:p>
-            <a:pPr algn="l" indent="0" marL="0">
+            <a:pPr eaLnBrk="0" algn="l" indent="0" marL="0">
               <a:buNone/>
             </a:pPr>
             <a:r>
@@ -6602,7 +6602,7 @@
           <a:bodyPr wrap="square" lIns="0" tIns="0" rIns="0" bIns="0" rtlCol="0" anchor="ctr"/>
           <a:lstStyle/>
           <a:p>
-            <a:pPr algn="ctr" indent="0" marL="0">
+            <a:pPr eaLnBrk="0" algn="ctr" indent="0" marL="0">
               <a:buNone/>
             </a:pPr>
             <a:r>
@@ -6641,7 +6641,7 @@
           <a:bodyPr wrap="square" lIns="0" tIns="0" rIns="0" bIns="0" rtlCol="0" anchor="ctr"/>
           <a:lstStyle/>
           <a:p>
-            <a:pPr algn="l" indent="0" marL="0">
+            <a:pPr eaLnBrk="0" algn="l" indent="0" marL="0">
               <a:buNone/>
             </a:pPr>
             <a:r>
@@ -6688,7 +6688,7 @@
           <a:bodyPr wrap="square" lIns="0" tIns="0" rIns="0" bIns="0" rtlCol="0" anchor="ctr"/>
           <a:lstStyle/>
           <a:p>
-            <a:pPr algn="ctr" indent="0" marL="0">
+            <a:pPr eaLnBrk="0" algn="ctr" indent="0" marL="0">
               <a:buNone/>
             </a:pPr>
             <a:r>
@@ -6727,7 +6727,7 @@
           <a:bodyPr wrap="square" lIns="0" tIns="0" rIns="0" bIns="0" rtlCol="0" anchor="ctr"/>
           <a:lstStyle/>
           <a:p>
-            <a:pPr algn="l" indent="0" marL="0">
+            <a:pPr eaLnBrk="0" algn="l" indent="0" marL="0">
               <a:buNone/>
             </a:pPr>
             <a:r>
@@ -6774,7 +6774,7 @@
           <a:bodyPr wrap="square" lIns="0" tIns="0" rIns="0" bIns="0" rtlCol="0" anchor="ctr"/>
           <a:lstStyle/>
           <a:p>
-            <a:pPr algn="ctr" indent="0" marL="0">
+            <a:pPr eaLnBrk="0" algn="ctr" indent="0" marL="0">
               <a:buNone/>
             </a:pPr>
             <a:r>
@@ -6813,7 +6813,7 @@
           <a:bodyPr wrap="square" lIns="0" tIns="0" rIns="0" bIns="0" rtlCol="0" anchor="ctr"/>
           <a:lstStyle/>
           <a:p>
-            <a:pPr algn="l" indent="0" marL="0">
+            <a:pPr eaLnBrk="0" algn="l" indent="0" marL="0">
               <a:buNone/>
             </a:pPr>
             <a:r>
@@ -6870,7 +6870,7 @@
             </a:lvl1pPr>
           </a:lstStyle>
           <a:p>
-            <a:pPr algn="r"/>
+            <a:pPr eaLnBrk="0" algn="r"/>
             <a:fld id="{F7021451-1387-4CA6-816F-3879F97B5CBC}" type="slidenum">
               <a:rPr b="0" lang="en-US"/>
               <a:t>8</a:t>
@@ -6927,7 +6927,7 @@
           <a:bodyPr wrap="square" lIns="0" tIns="0" rIns="0" bIns="0" rtlCol="0" anchor="ctr"/>
           <a:lstStyle/>
           <a:p>
-            <a:pPr algn="l" indent="0" marL="0">
+            <a:pPr eaLnBrk="0" algn="l" indent="0" marL="0">
               <a:buNone/>
             </a:pPr>
             <a:r>
@@ -6993,7 +6993,7 @@
           <a:bodyPr wrap="square" lIns="0" tIns="0" rIns="0" bIns="0" rtlCol="0" anchor="ctr"/>
           <a:lstStyle/>
           <a:p>
-            <a:pPr indent="0" marL="0">
+            <a:pPr eaLnBrk="0" indent="0" marL="0">
               <a:spcAft>
                 <a:spcPts val="600"/>
               </a:spcAft>
@@ -7062,7 +7062,7 @@
           <a:bodyPr wrap="square" lIns="0" tIns="0" rIns="0" bIns="0" rtlCol="0" anchor="t"/>
           <a:lstStyle/>
           <a:p>
-            <a:pPr indent="0" marL="0">
+            <a:pPr eaLnBrk="0" algn="l" indent="0" marL="0">
               <a:lnSpc>
                 <a:spcPct val="105000"/>
               </a:lnSpc>
@@ -7125,7 +7125,7 @@
             </a:lvl1pPr>
           </a:lstStyle>
           <a:p>
-            <a:pPr algn="r"/>
+            <a:pPr eaLnBrk="0" algn="r"/>
             <a:fld id="{F7021451-1387-4CA6-816F-3879F97B5CBC}" type="slidenum">
               <a:rPr b="0" lang="en-US"/>
               <a:t>9</a:t>

--- a/dist/초3/국어/읽기와어휘/초3_국어_읽기와어휘_02_문맥으로낱말뜻짐작_학생용.pptx
+++ b/dist/초3/국어/읽기와어휘/초3_국어_읽기와어휘_02_문맥으로낱말뜻짐작_학생용.pptx
@@ -118,38 +118,38 @@
   <p:extLst>
     <p:ext uri="{521415D9-36F7-43E2-AB2F-B90AF26B5E84}">
       <p14:sectionLst xmlns:p14="http://schemas.microsoft.com/office/powerpoint/2010/main">
-        <p14:section name="도입" id="{00bd3739-eb07-6705-c3e2-280cc0c4904f}">
+        <p14:section name="도입" id="{7cb14c40-35b5-6538-c884-8b18f0efa4f3}">
           <p14:sldIdLst>
             <p14:sldId id="256"/>
             <p14:sldId id="257"/>
           </p14:sldIdLst>
         </p14:section>
-        <p14:section name="개념" id="{6098aeed-513d-8f69-a549-687198dfd93c}">
+        <p14:section name="개념" id="{788361ca-2d66-0488-4513-726086b15745}">
           <p14:sldIdLst>
             <p14:sldId id="258"/>
             <p14:sldId id="259"/>
             <p14:sldId id="260"/>
           </p14:sldIdLst>
         </p14:section>
-        <p14:section name="연습" id="{a6c25948-5b8d-8322-de76-4d744d8ce763}">
+        <p14:section name="연습" id="{a6ab652c-94e8-bbbd-1506-a7b7d16d642b}">
           <p14:sldIdLst>
             <p14:sldId id="261"/>
             <p14:sldId id="262"/>
             <p14:sldId id="263"/>
           </p14:sldIdLst>
         </p14:section>
-        <p14:section name="확인" id="{1c899a2e-0de0-4ac9-04ee-4dcfdefc4c25}">
+        <p14:section name="확인" id="{7d90620d-5aea-5914-482a-1665e850d91c}">
           <p14:sldIdLst>
             <p14:sldId id="264"/>
             <p14:sldId id="265"/>
           </p14:sldIdLst>
         </p14:section>
-        <p14:section name="정리" id="{01a0fb6a-3f5d-c3e3-fa09-1c1c66ad2757}">
+        <p14:section name="정리" id="{2d3d07bc-22fd-4e68-e38a-3dd112010c4b}">
           <p14:sldIdLst>
             <p14:sldId id="266"/>
           </p14:sldIdLst>
         </p14:section>
-        <p14:section name="보충" id="{5e7fc4c8-87f8-1004-c42b-14c093becd14}">
+        <p14:section name="보충" id="{1f300be6-5ca5-89b4-016d-c5981d8e6b66}">
           <p14:sldIdLst>
             <p14:sldId id="267"/>
           </p14:sldIdLst>
@@ -4369,12 +4369,12 @@
         </p:nvSpPr>
         <p:spPr>
           <a:xfrm>
-            <a:off x="548640" y="5349240"/>
-            <a:ext cx="11091672" cy="868680"/>
+            <a:off x="548640" y="4959096"/>
+            <a:ext cx="11091672" cy="1258824"/>
           </a:xfrm>
           <a:prstGeom prst="roundRect">
             <a:avLst>
-              <a:gd name="adj" fmla="val 12632"/>
+              <a:gd name="adj" fmla="val 8717"/>
             </a:avLst>
           </a:prstGeom>
           <a:solidFill>
@@ -4396,8 +4396,8 @@
         </p:nvSpPr>
         <p:spPr>
           <a:xfrm>
-            <a:off x="822960" y="5486400"/>
-            <a:ext cx="10543032" cy="594360"/>
+            <a:off x="822960" y="5096256"/>
+            <a:ext cx="10543032" cy="984504"/>
           </a:xfrm>
           <a:prstGeom prst="rect">
             <a:avLst/>
@@ -4439,11 +4439,11 @@
         <p:spPr>
           <a:xfrm>
             <a:off x="548640" y="1325880"/>
-            <a:ext cx="11091672" cy="3794760"/>
+            <a:ext cx="11091672" cy="3404616"/>
           </a:xfrm>
           <a:prstGeom prst="roundRect">
             <a:avLst>
-              <a:gd name="adj" fmla="val 2410"/>
+              <a:gd name="adj" fmla="val 2686"/>
             </a:avLst>
           </a:prstGeom>
           <a:solidFill>
@@ -4466,7 +4466,7 @@
         <p:spPr>
           <a:xfrm>
             <a:off x="822960" y="1508760"/>
-            <a:ext cx="10543032" cy="3429000"/>
+            <a:ext cx="10543032" cy="3038856"/>
           </a:xfrm>
           <a:prstGeom prst="rect">
             <a:avLst/>
